--- a/presentation/Receipt-to-Cashback.pptx
+++ b/presentation/Receipt-to-Cashback.pptx
@@ -11459,14 +11459,6 @@
               </a:spcAft>
               <a:buNone/>
             </a:pPr>
-            <a:r>
-              <a:rPr lang="en" sz="2000">
-                <a:solidFill>
-                  <a:srgbClr val="FF0000"/>
-                </a:solidFill>
-              </a:rPr>
-              <a:t>Time of presentation : 1 min max</a:t>
-            </a:r>
             <a:endParaRPr sz="2000">
               <a:solidFill>
                 <a:srgbClr val="FF0000"/>
@@ -11648,14 +11640,6 @@
               </a:spcAft>
               <a:buNone/>
             </a:pPr>
-            <a:r>
-              <a:rPr lang="en" sz="2000">
-                <a:solidFill>
-                  <a:srgbClr val="FF0000"/>
-                </a:solidFill>
-              </a:rPr>
-              <a:t>Time of presentation : 30sec max</a:t>
-            </a:r>
             <a:endParaRPr sz="2000">
               <a:solidFill>
                 <a:srgbClr val="FF0000"/>
@@ -11843,14 +11827,6 @@
               </a:spcAft>
               <a:buNone/>
             </a:pPr>
-            <a:r>
-              <a:rPr lang="en" sz="2000">
-                <a:solidFill>
-                  <a:srgbClr val="FF0000"/>
-                </a:solidFill>
-              </a:rPr>
-              <a:t>Time of presentation : 1 min max</a:t>
-            </a:r>
             <a:endParaRPr sz="2000">
               <a:solidFill>
                 <a:srgbClr val="FF0000"/>
@@ -11919,131 +11895,13 @@
               <a:buNone/>
             </a:pPr>
             <a:r>
-              <a:rPr lang="en" sz="2400">
+              <a:rPr sz="2400">
                 <a:solidFill>
                   <a:srgbClr val="FFFFFF"/>
                 </a:solidFill>
                 <a:latin typeface="Oswald"/>
-                <a:ea typeface="Oswald"/>
-                <a:cs typeface="Oswald"/>
-                <a:sym typeface="Oswald"/>
               </a:rPr>
-              <a:t>Difficulties you managed to overcome</a:t>
-            </a:r>
-            <a:endParaRPr sz="2400">
-              <a:solidFill>
-                <a:srgbClr val="FFFFFF"/>
-              </a:solidFill>
-              <a:latin typeface="Oswald"/>
-              <a:ea typeface="Oswald"/>
-              <a:cs typeface="Oswald"/>
-              <a:sym typeface="Oswald"/>
-            </a:endParaRPr>
-          </a:p>
-          <a:p>
-            <a:pPr indent="0" lvl="0" marL="0" rtl="0" algn="l">
-              <a:spcBef>
-                <a:spcPts val="0"/>
-              </a:spcBef>
-              <a:spcAft>
-                <a:spcPts val="0"/>
-              </a:spcAft>
-              <a:buNone/>
-            </a:pPr>
-            <a:r>
-              <a:t/>
-            </a:r>
-            <a:endParaRPr sz="2400">
-              <a:solidFill>
-                <a:srgbClr val="FFFFFF"/>
-              </a:solidFill>
-              <a:latin typeface="Oswald"/>
-              <a:ea typeface="Oswald"/>
-              <a:cs typeface="Oswald"/>
-              <a:sym typeface="Oswald"/>
-            </a:endParaRPr>
-          </a:p>
-          <a:p>
-            <a:pPr indent="0" lvl="0" marL="0" rtl="0" algn="l">
-              <a:spcBef>
-                <a:spcPts val="0"/>
-              </a:spcBef>
-              <a:spcAft>
-                <a:spcPts val="0"/>
-              </a:spcAft>
-              <a:buNone/>
-            </a:pPr>
-            <a:r>
-              <a:t/>
-            </a:r>
-            <a:endParaRPr sz="2400">
-              <a:solidFill>
-                <a:srgbClr val="FFFFFF"/>
-              </a:solidFill>
-              <a:latin typeface="Oswald"/>
-              <a:ea typeface="Oswald"/>
-              <a:cs typeface="Oswald"/>
-              <a:sym typeface="Oswald"/>
-            </a:endParaRPr>
-          </a:p>
-          <a:p>
-            <a:pPr indent="0" lvl="0" marL="0" rtl="0" algn="l">
-              <a:spcBef>
-                <a:spcPts val="0"/>
-              </a:spcBef>
-              <a:spcAft>
-                <a:spcPts val="0"/>
-              </a:spcAft>
-              <a:buNone/>
-            </a:pPr>
-            <a:r>
-              <a:t/>
-            </a:r>
-            <a:endParaRPr sz="2400">
-              <a:solidFill>
-                <a:srgbClr val="FFFFFF"/>
-              </a:solidFill>
-              <a:latin typeface="Oswald"/>
-              <a:ea typeface="Oswald"/>
-              <a:cs typeface="Oswald"/>
-              <a:sym typeface="Oswald"/>
-            </a:endParaRPr>
-          </a:p>
-          <a:p>
-            <a:pPr indent="0" lvl="0" marL="0" rtl="0" algn="l">
-              <a:spcBef>
-                <a:spcPts val="0"/>
-              </a:spcBef>
-              <a:spcAft>
-                <a:spcPts val="0"/>
-              </a:spcAft>
-              <a:buNone/>
-            </a:pPr>
-            <a:r>
-              <a:t/>
-            </a:r>
-            <a:endParaRPr sz="2400">
-              <a:solidFill>
-                <a:srgbClr val="FFFFFF"/>
-              </a:solidFill>
-              <a:latin typeface="Oswald"/>
-              <a:ea typeface="Oswald"/>
-              <a:cs typeface="Oswald"/>
-              <a:sym typeface="Oswald"/>
-            </a:endParaRPr>
-          </a:p>
-          <a:p>
-            <a:pPr indent="0" lvl="0" marL="0" rtl="0" algn="l">
-              <a:spcBef>
-                <a:spcPts val="0"/>
-              </a:spcBef>
-              <a:spcAft>
-                <a:spcPts val="0"/>
-              </a:spcAft>
-              <a:buNone/>
-            </a:pPr>
-            <a:r>
-              <a:t/>
+              <a:t>Difficulties</a:t>
             </a:r>
             <a:endParaRPr sz="2400">
               <a:solidFill>
@@ -12147,14 +12005,6 @@
               </a:spcAft>
               <a:buNone/>
             </a:pPr>
-            <a:r>
-              <a:rPr lang="en" sz="2000">
-                <a:solidFill>
-                  <a:srgbClr val="FF0000"/>
-                </a:solidFill>
-              </a:rPr>
-              <a:t>Time of presentation : 1 min max</a:t>
-            </a:r>
             <a:endParaRPr sz="2000">
               <a:solidFill>
                 <a:srgbClr val="FF0000"/>
@@ -12198,131 +12048,13 @@
               <a:buNone/>
             </a:pPr>
             <a:r>
-              <a:rPr lang="en" sz="2400">
+              <a:rPr sz="2400">
                 <a:solidFill>
                   <a:srgbClr val="FFFFFF"/>
                 </a:solidFill>
                 <a:latin typeface="Oswald"/>
-                <a:ea typeface="Oswald"/>
-                <a:cs typeface="Oswald"/>
-                <a:sym typeface="Oswald"/>
               </a:rPr>
-              <a:t>My next step - functionalities you plan on implementing (OPTIONAL)</a:t>
-            </a:r>
-            <a:endParaRPr sz="2400">
-              <a:solidFill>
-                <a:srgbClr val="FFFFFF"/>
-              </a:solidFill>
-              <a:latin typeface="Oswald"/>
-              <a:ea typeface="Oswald"/>
-              <a:cs typeface="Oswald"/>
-              <a:sym typeface="Oswald"/>
-            </a:endParaRPr>
-          </a:p>
-          <a:p>
-            <a:pPr indent="0" lvl="0" marL="0" rtl="0" algn="l">
-              <a:spcBef>
-                <a:spcPts val="0"/>
-              </a:spcBef>
-              <a:spcAft>
-                <a:spcPts val="0"/>
-              </a:spcAft>
-              <a:buNone/>
-            </a:pPr>
-            <a:r>
-              <a:t/>
-            </a:r>
-            <a:endParaRPr sz="2400">
-              <a:solidFill>
-                <a:srgbClr val="FFFFFF"/>
-              </a:solidFill>
-              <a:latin typeface="Oswald"/>
-              <a:ea typeface="Oswald"/>
-              <a:cs typeface="Oswald"/>
-              <a:sym typeface="Oswald"/>
-            </a:endParaRPr>
-          </a:p>
-          <a:p>
-            <a:pPr indent="0" lvl="0" marL="0" rtl="0" algn="l">
-              <a:spcBef>
-                <a:spcPts val="0"/>
-              </a:spcBef>
-              <a:spcAft>
-                <a:spcPts val="0"/>
-              </a:spcAft>
-              <a:buNone/>
-            </a:pPr>
-            <a:r>
-              <a:t/>
-            </a:r>
-            <a:endParaRPr sz="2400">
-              <a:solidFill>
-                <a:srgbClr val="FFFFFF"/>
-              </a:solidFill>
-              <a:latin typeface="Oswald"/>
-              <a:ea typeface="Oswald"/>
-              <a:cs typeface="Oswald"/>
-              <a:sym typeface="Oswald"/>
-            </a:endParaRPr>
-          </a:p>
-          <a:p>
-            <a:pPr indent="0" lvl="0" marL="0" rtl="0" algn="l">
-              <a:spcBef>
-                <a:spcPts val="0"/>
-              </a:spcBef>
-              <a:spcAft>
-                <a:spcPts val="0"/>
-              </a:spcAft>
-              <a:buNone/>
-            </a:pPr>
-            <a:r>
-              <a:t/>
-            </a:r>
-            <a:endParaRPr sz="2400">
-              <a:solidFill>
-                <a:srgbClr val="FFFFFF"/>
-              </a:solidFill>
-              <a:latin typeface="Oswald"/>
-              <a:ea typeface="Oswald"/>
-              <a:cs typeface="Oswald"/>
-              <a:sym typeface="Oswald"/>
-            </a:endParaRPr>
-          </a:p>
-          <a:p>
-            <a:pPr indent="0" lvl="0" marL="0" rtl="0" algn="l">
-              <a:spcBef>
-                <a:spcPts val="0"/>
-              </a:spcBef>
-              <a:spcAft>
-                <a:spcPts val="0"/>
-              </a:spcAft>
-              <a:buNone/>
-            </a:pPr>
-            <a:r>
-              <a:t/>
-            </a:r>
-            <a:endParaRPr sz="2400">
-              <a:solidFill>
-                <a:srgbClr val="FFFFFF"/>
-              </a:solidFill>
-              <a:latin typeface="Oswald"/>
-              <a:ea typeface="Oswald"/>
-              <a:cs typeface="Oswald"/>
-              <a:sym typeface="Oswald"/>
-            </a:endParaRPr>
-          </a:p>
-          <a:p>
-            <a:pPr indent="0" lvl="0" marL="0" rtl="0" algn="l">
-              <a:spcBef>
-                <a:spcPts val="0"/>
-              </a:spcBef>
-              <a:spcAft>
-                <a:spcPts val="0"/>
-              </a:spcAft>
-              <a:buNone/>
-            </a:pPr>
-            <a:r>
-              <a:t/>
+              <a:t>Next steps (optional)</a:t>
             </a:r>
             <a:endParaRPr sz="2400">
               <a:solidFill>
@@ -12438,14 +12170,6 @@
               </a:spcAft>
               <a:buNone/>
             </a:pPr>
-            <a:r>
-              <a:rPr lang="en" sz="2000">
-                <a:solidFill>
-                  <a:srgbClr val="FF0000"/>
-                </a:solidFill>
-              </a:rPr>
-              <a:t>Time of presentation : 30sec max</a:t>
-            </a:r>
             <a:endParaRPr sz="2000">
               <a:solidFill>
                 <a:srgbClr val="FF0000"/>
@@ -12514,155 +12238,13 @@
               <a:buNone/>
             </a:pPr>
             <a:r>
-              <a:rPr lang="en" sz="2400">
+              <a:rPr sz="2400">
                 <a:solidFill>
                   <a:srgbClr val="FFFFFF"/>
                 </a:solidFill>
                 <a:latin typeface="Oswald"/>
-                <a:ea typeface="Oswald"/>
-                <a:cs typeface="Oswald"/>
-                <a:sym typeface="Oswald"/>
               </a:rPr>
-              <a:t>SHOW THE 3minutes videos + SHOW some part of </a:t>
-            </a:r>
-            <a:r>
-              <a:rPr lang="en" sz="2400">
-                <a:solidFill>
-                  <a:srgbClr val="FFFFFF"/>
-                </a:solidFill>
-                <a:latin typeface="Oswald"/>
-                <a:ea typeface="Oswald"/>
-                <a:cs typeface="Oswald"/>
-                <a:sym typeface="Oswald"/>
-              </a:rPr>
-              <a:t>the </a:t>
-            </a:r>
-            <a:r>
-              <a:rPr lang="en" sz="2400">
-                <a:solidFill>
-                  <a:srgbClr val="FFFFFF"/>
-                </a:solidFill>
-                <a:latin typeface="Oswald"/>
-                <a:ea typeface="Oswald"/>
-                <a:cs typeface="Oswald"/>
-                <a:sym typeface="Oswald"/>
-              </a:rPr>
-              <a:t>code</a:t>
-            </a:r>
-            <a:endParaRPr sz="2400">
-              <a:solidFill>
-                <a:srgbClr val="FFFFFF"/>
-              </a:solidFill>
-              <a:latin typeface="Oswald"/>
-              <a:ea typeface="Oswald"/>
-              <a:cs typeface="Oswald"/>
-              <a:sym typeface="Oswald"/>
-            </a:endParaRPr>
-          </a:p>
-          <a:p>
-            <a:pPr indent="0" lvl="0" marL="0" rtl="0" algn="l">
-              <a:spcBef>
-                <a:spcPts val="0"/>
-              </a:spcBef>
-              <a:spcAft>
-                <a:spcPts val="0"/>
-              </a:spcAft>
-              <a:buNone/>
-            </a:pPr>
-            <a:r>
-              <a:t/>
-            </a:r>
-            <a:endParaRPr sz="2400">
-              <a:solidFill>
-                <a:srgbClr val="FFFFFF"/>
-              </a:solidFill>
-              <a:latin typeface="Oswald"/>
-              <a:ea typeface="Oswald"/>
-              <a:cs typeface="Oswald"/>
-              <a:sym typeface="Oswald"/>
-            </a:endParaRPr>
-          </a:p>
-          <a:p>
-            <a:pPr indent="0" lvl="0" marL="0" rtl="0" algn="l">
-              <a:spcBef>
-                <a:spcPts val="0"/>
-              </a:spcBef>
-              <a:spcAft>
-                <a:spcPts val="0"/>
-              </a:spcAft>
-              <a:buNone/>
-            </a:pPr>
-            <a:r>
-              <a:t/>
-            </a:r>
-            <a:endParaRPr sz="2400">
-              <a:solidFill>
-                <a:srgbClr val="FFFFFF"/>
-              </a:solidFill>
-              <a:latin typeface="Oswald"/>
-              <a:ea typeface="Oswald"/>
-              <a:cs typeface="Oswald"/>
-              <a:sym typeface="Oswald"/>
-            </a:endParaRPr>
-          </a:p>
-          <a:p>
-            <a:pPr indent="0" lvl="0" marL="0" rtl="0" algn="l">
-              <a:spcBef>
-                <a:spcPts val="0"/>
-              </a:spcBef>
-              <a:spcAft>
-                <a:spcPts val="0"/>
-              </a:spcAft>
-              <a:buNone/>
-            </a:pPr>
-            <a:r>
-              <a:t/>
-            </a:r>
-            <a:endParaRPr sz="2400">
-              <a:solidFill>
-                <a:srgbClr val="FFFFFF"/>
-              </a:solidFill>
-              <a:latin typeface="Oswald"/>
-              <a:ea typeface="Oswald"/>
-              <a:cs typeface="Oswald"/>
-              <a:sym typeface="Oswald"/>
-            </a:endParaRPr>
-          </a:p>
-          <a:p>
-            <a:pPr indent="0" lvl="0" marL="0" rtl="0" algn="l">
-              <a:spcBef>
-                <a:spcPts val="0"/>
-              </a:spcBef>
-              <a:spcAft>
-                <a:spcPts val="0"/>
-              </a:spcAft>
-              <a:buNone/>
-            </a:pPr>
-            <a:r>
-              <a:t/>
-            </a:r>
-            <a:endParaRPr sz="2400">
-              <a:solidFill>
-                <a:srgbClr val="FFFFFF"/>
-              </a:solidFill>
-              <a:latin typeface="Oswald"/>
-              <a:ea typeface="Oswald"/>
-              <a:cs typeface="Oswald"/>
-              <a:sym typeface="Oswald"/>
-            </a:endParaRPr>
-          </a:p>
-          <a:p>
-            <a:pPr indent="0" lvl="0" marL="0" rtl="0" algn="l">
-              <a:spcBef>
-                <a:spcPts val="0"/>
-              </a:spcBef>
-              <a:spcAft>
-                <a:spcPts val="0"/>
-              </a:spcAft>
-              <a:buNone/>
-            </a:pPr>
-            <a:r>
-              <a:t/>
+              <a:t>Demo · video + code</a:t>
             </a:r>
             <a:endParaRPr sz="2400">
               <a:solidFill>
@@ -12755,14 +12337,6 @@
               </a:spcAft>
               <a:buNone/>
             </a:pPr>
-            <a:r>
-              <a:rPr lang="en" sz="2000">
-                <a:solidFill>
-                  <a:srgbClr val="FF0000"/>
-                </a:solidFill>
-              </a:rPr>
-              <a:t>Time of presentation : 4min max</a:t>
-            </a:r>
             <a:endParaRPr sz="2000">
               <a:solidFill>
                 <a:srgbClr val="FF0000"/>
@@ -12812,170 +12386,6 @@
               </a:spcAft>
               <a:buNone/>
             </a:pPr>
-            <a:r>
-              <a:rPr lang="en" sz="2000" u="sng">
-                <a:solidFill>
-                  <a:schemeClr val="accent5"/>
-                </a:solidFill>
-              </a:rPr>
-              <a:t>IMPORTANT </a:t>
-            </a:r>
-            <a:r>
-              <a:rPr lang="en" sz="2000">
-                <a:solidFill>
-                  <a:schemeClr val="accent5"/>
-                </a:solidFill>
-              </a:rPr>
-              <a:t>: your PPT + the video + the questions from the jury is </a:t>
-            </a:r>
-            <a:r>
-              <a:rPr b="1" lang="en" sz="2000" u="sng">
-                <a:solidFill>
-                  <a:schemeClr val="accent5"/>
-                </a:solidFill>
-              </a:rPr>
-              <a:t>10min maximum</a:t>
-            </a:r>
-            <a:r>
-              <a:rPr lang="en" sz="2000">
-                <a:solidFill>
-                  <a:schemeClr val="accent5"/>
-                </a:solidFill>
-              </a:rPr>
-              <a:t>. </a:t>
-            </a:r>
-            <a:endParaRPr sz="2000">
-              <a:solidFill>
-                <a:schemeClr val="accent5"/>
-              </a:solidFill>
-            </a:endParaRPr>
-          </a:p>
-          <a:p>
-            <a:pPr indent="0" lvl="0" marL="0" rtl="0" algn="l">
-              <a:spcBef>
-                <a:spcPts val="0"/>
-              </a:spcBef>
-              <a:spcAft>
-                <a:spcPts val="0"/>
-              </a:spcAft>
-              <a:buNone/>
-            </a:pPr>
-            <a:r>
-              <a:rPr lang="en" sz="2000">
-                <a:solidFill>
-                  <a:schemeClr val="accent5"/>
-                </a:solidFill>
-              </a:rPr>
-              <a:t>We propose you do :</a:t>
-            </a:r>
-            <a:endParaRPr sz="2000">
-              <a:solidFill>
-                <a:schemeClr val="accent5"/>
-              </a:solidFill>
-            </a:endParaRPr>
-          </a:p>
-          <a:p>
-            <a:pPr indent="-355600" lvl="0" marL="457200" rtl="0" algn="l">
-              <a:spcBef>
-                <a:spcPts val="0"/>
-              </a:spcBef>
-              <a:spcAft>
-                <a:spcPts val="0"/>
-              </a:spcAft>
-              <a:buClr>
-                <a:schemeClr val="accent5"/>
-              </a:buClr>
-              <a:buSzPts val="2000"/>
-              <a:buChar char="-"/>
-            </a:pPr>
-            <a:r>
-              <a:rPr lang="en" sz="2000">
-                <a:solidFill>
-                  <a:schemeClr val="accent5"/>
-                </a:solidFill>
-              </a:rPr>
-              <a:t>4min PPT</a:t>
-            </a:r>
-            <a:endParaRPr sz="2000">
-              <a:solidFill>
-                <a:schemeClr val="accent5"/>
-              </a:solidFill>
-            </a:endParaRPr>
-          </a:p>
-          <a:p>
-            <a:pPr indent="-355600" lvl="0" marL="457200" rtl="0" algn="l">
-              <a:spcBef>
-                <a:spcPts val="0"/>
-              </a:spcBef>
-              <a:spcAft>
-                <a:spcPts val="0"/>
-              </a:spcAft>
-              <a:buClr>
-                <a:schemeClr val="accent5"/>
-              </a:buClr>
-              <a:buSzPts val="2000"/>
-              <a:buChar char="-"/>
-            </a:pPr>
-            <a:r>
-              <a:rPr lang="en" sz="2000">
-                <a:solidFill>
-                  <a:schemeClr val="accent5"/>
-                </a:solidFill>
-              </a:rPr>
-              <a:t>4min video and code presentation</a:t>
-            </a:r>
-            <a:endParaRPr sz="2000">
-              <a:solidFill>
-                <a:schemeClr val="accent5"/>
-              </a:solidFill>
-            </a:endParaRPr>
-          </a:p>
-          <a:p>
-            <a:pPr indent="-355600" lvl="0" marL="457200" rtl="0" algn="l">
-              <a:spcBef>
-                <a:spcPts val="0"/>
-              </a:spcBef>
-              <a:spcAft>
-                <a:spcPts val="0"/>
-              </a:spcAft>
-              <a:buClr>
-                <a:schemeClr val="accent5"/>
-              </a:buClr>
-              <a:buSzPts val="2000"/>
-              <a:buChar char="-"/>
-            </a:pPr>
-            <a:r>
-              <a:rPr lang="en" sz="2000">
-                <a:solidFill>
-                  <a:schemeClr val="accent5"/>
-                </a:solidFill>
-              </a:rPr>
-              <a:t>2min question</a:t>
-            </a:r>
-            <a:endParaRPr sz="2000">
-              <a:solidFill>
-                <a:schemeClr val="accent5"/>
-              </a:solidFill>
-            </a:endParaRPr>
-          </a:p>
-          <a:p>
-            <a:pPr indent="0" lvl="0" marL="0" rtl="0" algn="l">
-              <a:spcBef>
-                <a:spcPts val="0"/>
-              </a:spcBef>
-              <a:spcAft>
-                <a:spcPts val="0"/>
-              </a:spcAft>
-              <a:buNone/>
-            </a:pPr>
-            <a:r>
-              <a:rPr lang="en" sz="2000">
-                <a:solidFill>
-                  <a:schemeClr val="accent5"/>
-                </a:solidFill>
-              </a:rPr>
-              <a:t>If you want more time for questions or to show us your project features, reduce the time of the PPT to the minimum.</a:t>
-            </a:r>
             <a:endParaRPr sz="2000">
               <a:solidFill>
                 <a:schemeClr val="accent5"/>
@@ -13206,14 +12616,14 @@
             </a:pPr>
             <a:r>
               <a:rPr/>
-              <a:t>CV: [REPLACE WITH YOUR CV URL — Drive / Dropbox / personal site]</a:t>
+              <a:t>CV: [REPLACE WITH YOUR CV URL]</a:t>
             </a:r>
             <a:endParaRPr/>
           </a:p>
           <a:p>
             <a:r>
               <a:rPr/>
-              <a:t>LinkedIn: https://www.linkedin.com/in/alex-goldbaum/  (verify URL)</a:t>
+              <a:t>LinkedIn: https://www.linkedin.com/in/alex-goldbaum/</a:t>
             </a:r>
           </a:p>
         </p:txBody>

--- a/presentation/Receipt-to-Cashback.pptx
+++ b/presentation/Receipt-to-Cashback.pptx
@@ -11427,46 +11427,6 @@
           </a:p>
         </p:txBody>
       </p:sp>
-      <p:sp>
-        <p:nvSpPr>
-          <p:cNvPr id="111" name="Google Shape;111;p26"/>
-          <p:cNvSpPr txBox="1"/>
-          <p:nvPr>
-            <p:ph type="title"/>
-          </p:nvPr>
-        </p:nvSpPr>
-        <p:spPr>
-          <a:xfrm>
-            <a:off x="4567200" y="297150"/>
-            <a:ext cx="4265100" cy="572700"/>
-          </a:xfrm>
-          <a:prstGeom prst="rect">
-            <a:avLst/>
-          </a:prstGeom>
-        </p:spPr>
-        <p:txBody>
-          <a:bodyPr anchorCtr="0" anchor="t" bIns="91425" lIns="91425" spcFirstLastPara="1" rIns="91425" wrap="square" tIns="91425">
-            <a:noAutofit/>
-          </a:bodyPr>
-          <a:lstStyle/>
-          <a:p>
-            <a:pPr indent="0" lvl="0" marL="0" rtl="0" algn="l">
-              <a:spcBef>
-                <a:spcPts val="0"/>
-              </a:spcBef>
-              <a:spcAft>
-                <a:spcPts val="0"/>
-              </a:spcAft>
-              <a:buNone/>
-            </a:pPr>
-            <a:endParaRPr sz="2000">
-              <a:solidFill>
-                <a:srgbClr val="FF0000"/>
-              </a:solidFill>
-            </a:endParaRPr>
-          </a:p>
-        </p:txBody>
-      </p:sp>
     </p:spTree>
   </p:cSld>
   <p:clrMapOvr>
@@ -11605,46 +11565,6 @@
               <a:rPr/>
               <a:t>Streamlit web app (4 pages) — SELF-TAUGHT</a:t>
             </a:r>
-          </a:p>
-        </p:txBody>
-      </p:sp>
-      <p:sp>
-        <p:nvSpPr>
-          <p:cNvPr id="118" name="Google Shape;118;p27"/>
-          <p:cNvSpPr txBox="1"/>
-          <p:nvPr>
-            <p:ph type="title"/>
-          </p:nvPr>
-        </p:nvSpPr>
-        <p:spPr>
-          <a:xfrm>
-            <a:off x="4567200" y="297150"/>
-            <a:ext cx="4265100" cy="572700"/>
-          </a:xfrm>
-          <a:prstGeom prst="rect">
-            <a:avLst/>
-          </a:prstGeom>
-        </p:spPr>
-        <p:txBody>
-          <a:bodyPr anchorCtr="0" anchor="t" bIns="91425" lIns="91425" spcFirstLastPara="1" rIns="91425" wrap="square" tIns="91425">
-            <a:noAutofit/>
-          </a:bodyPr>
-          <a:lstStyle/>
-          <a:p>
-            <a:pPr indent="0" lvl="0" marL="0" rtl="0" algn="l">
-              <a:spcBef>
-                <a:spcPts val="0"/>
-              </a:spcBef>
-              <a:spcAft>
-                <a:spcPts val="0"/>
-              </a:spcAft>
-              <a:buNone/>
-            </a:pPr>
-            <a:endParaRPr sz="2000">
-              <a:solidFill>
-                <a:srgbClr val="FF0000"/>
-              </a:solidFill>
-            </a:endParaRPr>
           </a:p>
         </p:txBody>
       </p:sp>
@@ -11792,46 +11712,6 @@
               <a:rPr/>
               <a:t>Branch-per-feature git workflow with --no-ff merges</a:t>
             </a:r>
-          </a:p>
-        </p:txBody>
-      </p:sp>
-      <p:sp>
-        <p:nvSpPr>
-          <p:cNvPr id="125" name="Google Shape;125;p28"/>
-          <p:cNvSpPr txBox="1"/>
-          <p:nvPr>
-            <p:ph type="title"/>
-          </p:nvPr>
-        </p:nvSpPr>
-        <p:spPr>
-          <a:xfrm>
-            <a:off x="4567200" y="297150"/>
-            <a:ext cx="4265100" cy="572700"/>
-          </a:xfrm>
-          <a:prstGeom prst="rect">
-            <a:avLst/>
-          </a:prstGeom>
-        </p:spPr>
-        <p:txBody>
-          <a:bodyPr anchorCtr="0" anchor="t" bIns="91425" lIns="91425" spcFirstLastPara="1" rIns="91425" wrap="square" tIns="91425">
-            <a:noAutofit/>
-          </a:bodyPr>
-          <a:lstStyle/>
-          <a:p>
-            <a:pPr indent="0" lvl="0" marL="0" rtl="0" algn="l">
-              <a:spcBef>
-                <a:spcPts val="0"/>
-              </a:spcBef>
-              <a:spcAft>
-                <a:spcPts val="0"/>
-              </a:spcAft>
-              <a:buNone/>
-            </a:pPr>
-            <a:endParaRPr sz="2000">
-              <a:solidFill>
-                <a:srgbClr val="FF0000"/>
-              </a:solidFill>
-            </a:endParaRPr>
           </a:p>
         </p:txBody>
       </p:sp>
@@ -11949,67 +11829,39 @@
             </a:pPr>
             <a:r>
               <a:rPr/>
-              <a:t>Original partner-rebate business model gated cashback on most receipts → pivoted to market-research model: every priced line pays out</a:t>
+              <a:t>Real users instead of a synthetic population</a:t>
             </a:r>
             <a:endParaRPr/>
           </a:p>
           <a:p>
             <a:r>
               <a:rPr/>
-              <a:t>English-only embedding rejected Indonesian item 'PKT AYAM' → switched to paraphrase-multilingual-MiniLM-L12-v2 → 100% classification</a:t>
+              <a:t>Postgres warehouse for receipt records</a:t>
             </a:r>
           </a:p>
           <a:p>
             <a:r>
               <a:rPr/>
-              <a:t>End-to-end latency was 40+ seconds on first run → moved to Gemini Flash Lite + image-hash cache → ~8 seconds</a:t>
+              <a:t>Image-level redaction of cardholder data and identifiers</a:t>
             </a:r>
           </a:p>
           <a:p>
             <a:r>
               <a:rPr/>
-              <a:t>Rehearsal: LLM double-counted items (+70% inflation) and later under-read totals (1,591,600 → 591,600) → built two-tier drift guard that scales at 10% and refuses payment at 50%</a:t>
+              <a:t>K-anonymity floor before any aggregated data is sold</a:t>
             </a:r>
           </a:p>
-        </p:txBody>
-      </p:sp>
-      <p:sp>
-        <p:nvSpPr>
-          <p:cNvPr id="132" name="Google Shape;132;p29"/>
-          <p:cNvSpPr txBox="1"/>
-          <p:nvPr>
-            <p:ph idx="4294967295" type="title"/>
-          </p:nvPr>
-        </p:nvSpPr>
-        <p:spPr>
-          <a:xfrm>
-            <a:off x="4567200" y="244925"/>
-            <a:ext cx="4265100" cy="572700"/>
-          </a:xfrm>
-          <a:prstGeom prst="rect">
-            <a:avLst/>
-          </a:prstGeom>
-        </p:spPr>
-        <p:txBody>
-          <a:bodyPr anchorCtr="0" anchor="t" bIns="91425" lIns="91425" spcFirstLastPara="1" rIns="91425" wrap="square" tIns="91425">
-            <a:noAutofit/>
-          </a:bodyPr>
-          <a:lstStyle/>
           <a:p>
-            <a:pPr indent="0" lvl="0" marL="0" rtl="0" algn="l">
-              <a:spcBef>
-                <a:spcPts val="0"/>
-              </a:spcBef>
-              <a:spcAft>
-                <a:spcPts val="0"/>
-              </a:spcAft>
-              <a:buNone/>
-            </a:pPr>
-            <a:endParaRPr sz="2000">
-              <a:solidFill>
-                <a:srgbClr val="FF0000"/>
-              </a:solidFill>
-            </a:endParaRPr>
+            <a:r>
+              <a:rPr/>
+              <a:t>MCP 'spend search' agent (e.g. 'how much did I spend on coffee in May?')</a:t>
+            </a:r>
+          </a:p>
+          <a:p>
+            <a:r>
+              <a:rPr/>
+              <a:t>Multilingual OCR (Hebrew, Arabic) for global users</a:t>
+            </a:r>
           </a:p>
         </p:txBody>
       </p:sp>
@@ -12102,79 +11954,27 @@
             </a:pPr>
             <a:r>
               <a:rPr/>
-              <a:t>Real users instead of a synthetic population</a:t>
+              <a:t>Original partner-rebate business model gated cashback on most receipts → pivoted to market-research model: every priced line pays out</a:t>
             </a:r>
             <a:endParaRPr/>
           </a:p>
           <a:p>
             <a:r>
               <a:rPr/>
-              <a:t>Postgres warehouse for receipt records</a:t>
+              <a:t>English-only embedding rejected Indonesian item 'PKT AYAM' → switched to paraphrase-multilingual-MiniLM-L12-v2 → 100% classification</a:t>
             </a:r>
           </a:p>
           <a:p>
             <a:r>
               <a:rPr/>
-              <a:t>Image-level redaction of cardholder data and identifiers</a:t>
+              <a:t>End-to-end latency was 40+ seconds on first run → moved to Gemini Flash Lite + image-hash cache → ~8 seconds</a:t>
             </a:r>
           </a:p>
           <a:p>
             <a:r>
               <a:rPr/>
-              <a:t>K-anonymity floor before any aggregated data is sold</a:t>
+              <a:t>Rehearsal: LLM double-counted items (+70% inflation) and later under-read totals (1,591,600 → 591,600) → built two-tier drift guard that scales at 10% and refuses payment at 50%</a:t>
             </a:r>
-          </a:p>
-          <a:p>
-            <a:r>
-              <a:rPr/>
-              <a:t>MCP 'spend search' agent (e.g. 'how much did I spend on coffee in May?')</a:t>
-            </a:r>
-          </a:p>
-          <a:p>
-            <a:r>
-              <a:rPr/>
-              <a:t>Multilingual OCR (Hebrew, Arabic) for global users</a:t>
-            </a:r>
-          </a:p>
-        </p:txBody>
-      </p:sp>
-      <p:sp>
-        <p:nvSpPr>
-          <p:cNvPr id="135" name="Google Shape;135;p29"/>
-          <p:cNvSpPr txBox="1"/>
-          <p:nvPr>
-            <p:ph idx="4294967295" type="title"/>
-          </p:nvPr>
-        </p:nvSpPr>
-        <p:spPr>
-          <a:xfrm>
-            <a:off x="4797925" y="3112675"/>
-            <a:ext cx="4265100" cy="572700"/>
-          </a:xfrm>
-          <a:prstGeom prst="rect">
-            <a:avLst/>
-          </a:prstGeom>
-        </p:spPr>
-        <p:txBody>
-          <a:bodyPr anchorCtr="0" anchor="t" bIns="91425" lIns="91425" spcFirstLastPara="1" rIns="91425" wrap="square" tIns="91425">
-            <a:noAutofit/>
-          </a:bodyPr>
-          <a:lstStyle/>
-          <a:p>
-            <a:pPr indent="0" lvl="0" marL="0" rtl="0" algn="l">
-              <a:spcBef>
-                <a:spcPts val="0"/>
-              </a:spcBef>
-              <a:spcAft>
-                <a:spcPts val="0"/>
-              </a:spcAft>
-              <a:buNone/>
-            </a:pPr>
-            <a:endParaRPr sz="2000">
-              <a:solidFill>
-                <a:srgbClr val="FF0000"/>
-              </a:solidFill>
-            </a:endParaRPr>
           </a:p>
         </p:txBody>
       </p:sp>
@@ -12302,95 +12102,6 @@
               <a:rPr/>
               <a:t>Loom video (3 min): [WILL BE ADDED AFTER RECORDING — see docs/05_demo_script.md]</a:t>
             </a:r>
-          </a:p>
-        </p:txBody>
-      </p:sp>
-      <p:sp>
-        <p:nvSpPr>
-          <p:cNvPr id="142" name="Google Shape;142;p30"/>
-          <p:cNvSpPr txBox="1"/>
-          <p:nvPr>
-            <p:ph idx="4294967295" type="title"/>
-          </p:nvPr>
-        </p:nvSpPr>
-        <p:spPr>
-          <a:xfrm>
-            <a:off x="4654800" y="1324175"/>
-            <a:ext cx="4265100" cy="572700"/>
-          </a:xfrm>
-          <a:prstGeom prst="rect">
-            <a:avLst/>
-          </a:prstGeom>
-        </p:spPr>
-        <p:txBody>
-          <a:bodyPr anchorCtr="0" anchor="t" bIns="91425" lIns="91425" spcFirstLastPara="1" rIns="91425" wrap="square" tIns="91425">
-            <a:noAutofit/>
-          </a:bodyPr>
-          <a:lstStyle/>
-          <a:p>
-            <a:pPr indent="0" lvl="0" marL="0" rtl="0" algn="l">
-              <a:spcBef>
-                <a:spcPts val="0"/>
-              </a:spcBef>
-              <a:spcAft>
-                <a:spcPts val="0"/>
-              </a:spcAft>
-              <a:buNone/>
-            </a:pPr>
-            <a:endParaRPr sz="2000">
-              <a:solidFill>
-                <a:srgbClr val="FF0000"/>
-              </a:solidFill>
-            </a:endParaRPr>
-          </a:p>
-        </p:txBody>
-      </p:sp>
-      <p:sp>
-        <p:nvSpPr>
-          <p:cNvPr id="143" name="Google Shape;143;p30"/>
-          <p:cNvSpPr txBox="1"/>
-          <p:nvPr>
-            <p:ph idx="4294967295" type="title"/>
-          </p:nvPr>
-        </p:nvSpPr>
-        <p:spPr>
-          <a:xfrm>
-            <a:off x="267900" y="2103225"/>
-            <a:ext cx="8608200" cy="2733900"/>
-          </a:xfrm>
-          <a:prstGeom prst="rect">
-            <a:avLst/>
-          </a:prstGeom>
-          <a:ln cap="flat" cmpd="sng" w="9525">
-            <a:solidFill>
-              <a:srgbClr val="00FFFF"/>
-            </a:solidFill>
-            <a:prstDash val="solid"/>
-            <a:round/>
-            <a:headEnd len="sm" w="sm" type="none"/>
-            <a:tailEnd len="sm" w="sm" type="none"/>
-          </a:ln>
-        </p:spPr>
-        <p:txBody>
-          <a:bodyPr anchorCtr="0" anchor="t" bIns="91425" lIns="91425" spcFirstLastPara="1" rIns="91425" wrap="square" tIns="91425">
-            <a:noAutofit/>
-          </a:bodyPr>
-          <a:lstStyle/>
-          <a:p>
-            <a:pPr indent="0" lvl="0" marL="0" rtl="0" algn="l">
-              <a:spcBef>
-                <a:spcPts val="0"/>
-              </a:spcBef>
-              <a:spcAft>
-                <a:spcPts val="0"/>
-              </a:spcAft>
-              <a:buNone/>
-            </a:pPr>
-            <a:endParaRPr sz="2000">
-              <a:solidFill>
-                <a:schemeClr val="accent5"/>
-              </a:solidFill>
-            </a:endParaRPr>
           </a:p>
         </p:txBody>
       </p:sp>

--- a/presentation/Receipt-to-Cashback.pptx
+++ b/presentation/Receipt-to-Cashback.pptx
@@ -11973,7 +11973,7 @@
           <a:p>
             <a:r>
               <a:rPr/>
-              <a:t>Rehearsal: LLM double-counted items (+70% inflation) and later under-read totals (1,591,600 → 591,600) → built two-tier drift guard that scales at 10% and refuses payment at 50%</a:t>
+              <a:t>OCR and LLM aren't perfect — they sometimes double-count items or misread the total. Sanity check: if the sum of items disagrees with the printed total by 10%, we trust the printed total; if by 50%, we refuse the cashback and ask the user for another photo.</a:t>
             </a:r>
           </a:p>
         </p:txBody>

--- a/presentation/Receipt-to-Cashback.pptx
+++ b/presentation/Receipt-to-Cashback.pptx
@@ -12100,7 +12100,7 @@
           <a:p>
             <a:r>
               <a:rPr/>
-              <a:t>Loom video (3 min): [WILL BE ADDED AFTER RECORDING — see docs/05_demo_script.md]</a:t>
+              <a:t>Loom video (2:53): https://www.loom.com/share/b10268c4694f4a8f8cf5e7292aef7a21</a:t>
             </a:r>
           </a:p>
         </p:txBody>
@@ -12217,7 +12217,7 @@
           <a:p>
             <a:r>
               <a:rPr/>
-              <a:t>3-min video (Loom): [WILL BE ADDED AFTER RECORDING]</a:t>
+              <a:t>Demo video (Loom, 2:53): https://www.loom.com/share/b10268c4694f4a8f8cf5e7292aef7a21</a:t>
             </a:r>
           </a:p>
           <a:p>

--- a/presentation/Receipt-to-Cashback.pptx
+++ b/presentation/Receipt-to-Cashback.pptx
@@ -11369,7 +11369,7 @@
             </a:pPr>
             <a:r>
               <a:rPr/>
-              <a:t>Receipt-to-Cashback</a:t>
+              <a:t>Scan a receipt. Get cashback. We sell the data.</a:t>
             </a:r>
             <a:endParaRPr/>
           </a:p>
@@ -11385,8 +11385,8 @@
         </p:nvSpPr>
         <p:spPr>
           <a:xfrm>
-            <a:off x="311700" y="1152475"/>
-            <a:ext cx="8520600" cy="3416400"/>
+            <a:off x="274320" y="1152475"/>
+            <a:ext cx="4389120" cy="3416400"/>
           </a:xfrm>
           <a:prstGeom prst="rect">
             <a:avLst/>
@@ -11408,25 +11408,61 @@
               <a:buNone/>
             </a:pPr>
             <a:r>
-              <a:rPr/>
-              <a:t>A market-research data-acquisition app: users scan a receipt; we pay a flat cashback in exchange for the itemised consumption data, which we anonymise and sell in aggregate to brands and research firms.</a:t>
+              <a:rPr sz="1400"/>
+              <a:t>A market-research data-acquisition app.</a:t>
             </a:r>
             <a:endParaRPr/>
           </a:p>
           <a:p>
             <a:r>
-              <a:rPr/>
-              <a:t>Problem solved: market research today buys slow self-reported surveys; loyalty programs see one retailer at a time. Nobody has the cross-merchant, item-level picture of what consumers actually buy. We do.</a:t>
+              <a:rPr sz="1400"/>
+              <a:t/>
             </a:r>
           </a:p>
           <a:p>
             <a:r>
-              <a:rPr/>
-              <a:t>Target users: consumers who want any-merchant cashback (B2C) and brands, retailers and market-research firms as data buyers (B2B).</a:t>
+              <a:rPr sz="1400"/>
+              <a:t>Users scan a receipt → we pay flat cashback in exchange for the itemised consumption data → we anonymise it and sell it in aggregate to brands, retailers and research firms.</a:t>
+            </a:r>
+          </a:p>
+          <a:p>
+            <a:r>
+              <a:rPr sz="1400"/>
+              <a:t/>
+            </a:r>
+          </a:p>
+          <a:p>
+            <a:r>
+              <a:rPr sz="1400"/>
+              <a:t>Solves a real gap: no one today has a cross-merchant, item-level picture of what consumers actually buy. We get it by paying the consumer directly.</a:t>
             </a:r>
           </a:p>
         </p:txBody>
       </p:sp>
+      <p:pic>
+        <p:nvPicPr>
+          <p:cNvPr id="111" name="Picture 110" descr="04_about.png"/>
+          <p:cNvPicPr>
+            <a:picLocks noChangeAspect="1"/>
+          </p:cNvPicPr>
+          <p:nvPr/>
+        </p:nvPicPr>
+        <p:blipFill>
+          <a:blip r:embed="rId3"/>
+          <a:stretch>
+            <a:fillRect/>
+          </a:stretch>
+        </p:blipFill>
+        <p:spPr>
+          <a:xfrm>
+            <a:off x="4389120" y="1188720"/>
+            <a:ext cx="5852160" cy="3657600"/>
+          </a:xfrm>
+          <a:prstGeom prst="rect">
+            <a:avLst/>
+          </a:prstGeom>
+        </p:spPr>
+      </p:pic>
     </p:spTree>
   </p:cSld>
   <p:clrMapOvr>
@@ -11525,45 +11561,45 @@
               <a:buNone/>
             </a:pPr>
             <a:r>
-              <a:rPr/>
-              <a:t>Python · OOP · Pydantic — bootcamp Week 1–2</a:t>
+              <a:rPr sz="1300"/>
+              <a:t>OCR + extraction — Gemini 2.5 Flash Vision (image → structured JSON, one call)</a:t>
             </a:r>
             <a:endParaRPr/>
           </a:p>
           <a:p>
             <a:r>
-              <a:rPr/>
-              <a:t>pandas · matplotlib · seaborn — bootcamp Week 3–4</a:t>
+              <a:rPr sz="1300"/>
+              <a:t>Schema validation — Pydantic (strict + retry on malformed output)</a:t>
             </a:r>
           </a:p>
           <a:p>
             <a:r>
-              <a:rPr/>
-              <a:t>scikit-learn KMeans · scipy Welch's t-test — bootcamp Week 4–5</a:t>
+              <a:rPr sz="1300"/>
+              <a:t>Vector search — FAISS + multilingual sentence-transformer</a:t>
             </a:r>
           </a:p>
           <a:p>
             <a:r>
-              <a:rPr/>
-              <a:t>EasyOCR (CRAFT + CRNN) — bootcamp Week 7</a:t>
+              <a:rPr sz="1300"/>
+              <a:t>Clustering &amp; A/B — scikit-learn KMeans + scipy Welch's t-test</a:t>
             </a:r>
           </a:p>
           <a:p>
             <a:r>
-              <a:rPr/>
-              <a:t>FAISS + multilingual sentence-transformer — bootcamp Week 8</a:t>
+              <a:rPr sz="1300"/>
+              <a:t>Data wrangling — pandas, matplotlib, seaborn</a:t>
             </a:r>
           </a:p>
           <a:p>
             <a:r>
-              <a:rPr/>
-              <a:t>Gemini 2.5 Flash Lite + few-shot + strict Pydantic schema — bootcamp Week 9</a:t>
+              <a:rPr sz="1300"/>
+              <a:t>Web app — Streamlit (4 pages: Upload · B2B · Ethics · About)  — SELF-TAUGHT</a:t>
             </a:r>
           </a:p>
           <a:p>
             <a:r>
-              <a:rPr/>
-              <a:t>Streamlit web app (4 pages) — SELF-TAUGHT</a:t>
+              <a:rPr sz="1300"/>
+              <a:t>Code style — Python OOP + dataclasses + type hints (bootcamp Weeks 1–9)</a:t>
             </a:r>
           </a:p>
         </p:txBody>
@@ -11627,7 +11663,7 @@
             </a:pPr>
             <a:r>
               <a:rPr/>
-              <a:t>Features list</a:t>
+              <a:t>Upload → 32,000 IDR in 8 seconds.</a:t>
             </a:r>
             <a:endParaRPr/>
           </a:p>
@@ -11643,8 +11679,8 @@
         </p:nvSpPr>
         <p:spPr>
           <a:xfrm>
-            <a:off x="311700" y="1152475"/>
-            <a:ext cx="8520600" cy="3416400"/>
+            <a:off x="274320" y="1152475"/>
+            <a:ext cx="4114800" cy="3416400"/>
           </a:xfrm>
           <a:prstGeom prst="rect">
             <a:avLst/>
@@ -11666,55 +11702,91 @@
               <a:buNone/>
             </a:pPr>
             <a:r>
-              <a:rPr/>
-              <a:t>Upload page: receipt photo → cashback number in ~8 seconds end-to-end</a:t>
+              <a:rPr sz="1300"/>
+              <a:t>Upload page (live demo on the right):</a:t>
             </a:r>
             <a:endParaRPr/>
           </a:p>
           <a:p>
             <a:r>
-              <a:rPr/>
-              <a:t>OCR + LLM extractor with strict Pydantic schema and few-shot prompts</a:t>
+              <a:rPr sz="1300"/>
+              <a:t>• photo of receipt → cashback number end-to-end in ~8 s</a:t>
             </a:r>
           </a:p>
           <a:p>
             <a:r>
-              <a:rPr/>
-              <a:t>Multilingual semantic matching against a 110-SKU F&amp;B catalog (FAISS)</a:t>
+              <a:rPr sz="1300"/>
+              <a:t>• every item classified into food / beverage / bakery / …</a:t>
             </a:r>
           </a:p>
           <a:p>
             <a:r>
-              <a:rPr/>
-              <a:t>Two-tier drift guard: scales at 10% drift, refuses cashback at 50%</a:t>
+              <a:rPr sz="1300"/>
+              <a:t>• raw Gemini JSON visible for debugging</a:t>
             </a:r>
           </a:p>
           <a:p>
             <a:r>
-              <a:rPr/>
-              <a:t>B2B Analytics page: K-Means user clustering + A/B-test simulation (Welch's t-test)</a:t>
+              <a:rPr sz="1300"/>
+              <a:t/>
             </a:r>
           </a:p>
           <a:p>
             <a:r>
-              <a:rPr/>
-              <a:t>Ethics tab inside the app + full ethics doc in the repo</a:t>
+              <a:rPr sz="1300"/>
+              <a:t>B2B Analytics page:</a:t>
             </a:r>
           </a:p>
           <a:p>
             <a:r>
-              <a:rPr/>
-              <a:t>13 unit tests on the CashbackEngine — all passing</a:t>
+              <a:rPr sz="1300"/>
+              <a:t>• A/B-test simulation of two cashback rates</a:t>
             </a:r>
           </a:p>
           <a:p>
             <a:r>
-              <a:rPr/>
-              <a:t>Branch-per-feature git workflow with --no-ff merges</a:t>
+              <a:rPr sz="1300"/>
+              <a:t>• K-Means user clustering with PCA projection</a:t>
+            </a:r>
+          </a:p>
+          <a:p>
+            <a:r>
+              <a:rPr sz="1300"/>
+              <a:t/>
+            </a:r>
+          </a:p>
+          <a:p>
+            <a:r>
+              <a:rPr sz="1300"/>
+              <a:t>Ethics tab — surfaced in the app, not buried in a doc.</a:t>
             </a:r>
           </a:p>
         </p:txBody>
       </p:sp>
+      <p:pic>
+        <p:nvPicPr>
+          <p:cNvPr id="125" name="Picture 124" descr="01_upload_result_right.png"/>
+          <p:cNvPicPr>
+            <a:picLocks noChangeAspect="1"/>
+          </p:cNvPicPr>
+          <p:nvPr/>
+        </p:nvPicPr>
+        <p:blipFill>
+          <a:blip r:embed="rId3"/>
+          <a:stretch>
+            <a:fillRect/>
+          </a:stretch>
+        </p:blipFill>
+        <p:spPr>
+          <a:xfrm>
+            <a:off x="4389120" y="1188720"/>
+            <a:ext cx="3657600" cy="3657600"/>
+          </a:xfrm>
+          <a:prstGeom prst="rect">
+            <a:avLst/>
+          </a:prstGeom>
+        </p:spPr>
+      </p:pic>
     </p:spTree>
   </p:cSld>
   <p:clrMapOvr>
@@ -11828,39 +11900,27 @@
               <a:buNone/>
             </a:pPr>
             <a:r>
-              <a:rPr/>
-              <a:t>Real users instead of a synthetic population</a:t>
+              <a:rPr sz="1200"/>
+              <a:t>Real users (replace synthetic population)</a:t>
             </a:r>
             <a:endParaRPr/>
           </a:p>
           <a:p>
             <a:r>
-              <a:rPr/>
-              <a:t>Postgres warehouse for receipt records</a:t>
+              <a:rPr sz="1200"/>
+              <a:t>Postgres warehouse + image-level PII redaction</a:t>
             </a:r>
           </a:p>
           <a:p>
             <a:r>
-              <a:rPr/>
-              <a:t>Image-level redaction of cardholder data and identifiers</a:t>
+              <a:rPr sz="1200"/>
+              <a:t>K-anonymity floor before any data sale</a:t>
             </a:r>
           </a:p>
           <a:p>
             <a:r>
-              <a:rPr/>
-              <a:t>K-anonymity floor before any aggregated data is sold</a:t>
-            </a:r>
-          </a:p>
-          <a:p>
-            <a:r>
-              <a:rPr/>
-              <a:t>MCP 'spend search' agent (e.g. 'how much did I spend on coffee in May?')</a:t>
-            </a:r>
-          </a:p>
-          <a:p>
-            <a:r>
-              <a:rPr/>
-              <a:t>Multilingual OCR (Hebrew, Arabic) for global users</a:t>
+              <a:rPr sz="1200"/>
+              <a:t>MCP 'spend search' agent</a:t>
             </a:r>
           </a:p>
         </p:txBody>
@@ -11906,7 +11966,7 @@
                 </a:solidFill>
                 <a:latin typeface="Oswald"/>
               </a:rPr>
-              <a:t>Next steps (optional)</a:t>
+              <a:t>Next steps</a:t>
             </a:r>
             <a:endParaRPr sz="2400">
               <a:solidFill>
@@ -11953,27 +12013,21 @@
               <a:buNone/>
             </a:pPr>
             <a:r>
-              <a:rPr/>
-              <a:t>Original partner-rebate business model gated cashback on most receipts → pivoted to market-research model: every priced line pays out</a:t>
+              <a:rPr sz="1200"/>
+              <a:t>Original 'partner-rebate' model rejected most receipts → pivoted to market-research data acquisition (all priced lines pay out).</a:t>
             </a:r>
             <a:endParaRPr/>
           </a:p>
           <a:p>
             <a:r>
-              <a:rPr/>
-              <a:t>English-only embedding rejected Indonesian item 'PKT AYAM' → switched to paraphrase-multilingual-MiniLM-L12-v2 → 100% classification</a:t>
+              <a:rPr sz="1200"/>
+              <a:t>English-only embedding rejected Indonesian items → multilingual sentence-transformer fixed it (100 % classification).</a:t>
             </a:r>
           </a:p>
           <a:p>
             <a:r>
-              <a:rPr/>
-              <a:t>End-to-end latency was 40+ seconds on first run → moved to Gemini Flash Lite + image-hash cache → ~8 seconds</a:t>
-            </a:r>
-          </a:p>
-          <a:p>
-            <a:r>
-              <a:rPr/>
-              <a:t>OCR and LLM aren't perfect — they sometimes double-count items or misread the total. Sanity check: if the sum of items disagrees with the printed total by 10%, we trust the printed total; if by 50%, we refuse the cashback and ask the user for another photo.</a:t>
+              <a:rPr sz="1200"/>
+              <a:t>Two-step OCR → LLM pipeline misread the grand total → replaced with single Gemini Vision multimodal call.</a:t>
             </a:r>
           </a:p>
         </p:txBody>
@@ -12044,7 +12098,7 @@
                 </a:solidFill>
                 <a:latin typeface="Oswald"/>
               </a:rPr>
-              <a:t>Demo · video + code</a:t>
+              <a:t>See it work</a:t>
             </a:r>
             <a:endParaRPr sz="2400">
               <a:solidFill>
@@ -12068,8 +12122,8 @@
         </p:nvSpPr>
         <p:spPr>
           <a:xfrm>
-            <a:off x="311700" y="863550"/>
-            <a:ext cx="8520600" cy="3416400"/>
+            <a:off x="274320" y="863550"/>
+            <a:ext cx="4389120" cy="3416400"/>
           </a:xfrm>
           <a:prstGeom prst="rect">
             <a:avLst/>
@@ -12092,19 +12146,43 @@
               <a:buChar char="-"/>
             </a:pPr>
             <a:r>
-              <a:rPr/>
-              <a:t>Live demo: https://huggingface.co/spaces/alexgl77/receipt-to-cashback</a:t>
+              <a:rPr sz="1200"/>
+              <a:t>Live app   →  https://huggingface.co/spaces/alexgl77/receipt-to-cashback</a:t>
             </a:r>
             <a:endParaRPr/>
           </a:p>
           <a:p>
             <a:r>
-              <a:rPr/>
-              <a:t>Loom video (2:53): https://www.loom.com/share/b10268c4694f4a8f8cf5e7292aef7a21</a:t>
+              <a:rPr sz="1200"/>
+              <a:t>Demo video →  https://www.loom.com/share/b10268c4694f4a8f8cf5e7292aef7a21  (2:53)</a:t>
             </a:r>
           </a:p>
         </p:txBody>
       </p:sp>
+      <p:pic>
+        <p:nvPicPr>
+          <p:cNvPr id="142" name="Picture 141" descr="02_b2b_analytics.png"/>
+          <p:cNvPicPr>
+            <a:picLocks noChangeAspect="1"/>
+          </p:cNvPicPr>
+          <p:nvPr/>
+        </p:nvPicPr>
+        <p:blipFill>
+          <a:blip r:embed="rId3"/>
+          <a:stretch>
+            <a:fillRect/>
+          </a:stretch>
+        </p:blipFill>
+        <p:spPr>
+          <a:xfrm>
+            <a:off x="4389120" y="1188720"/>
+            <a:ext cx="5852160" cy="3657600"/>
+          </a:xfrm>
+          <a:prstGeom prst="rect">
+            <a:avLst/>
+          </a:prstGeom>
+        </p:spPr>
+      </p:pic>
     </p:spTree>
   </p:cSld>
   <p:clrMapOvr>
@@ -12203,27 +12281,27 @@
               <a:buNone/>
             </a:pPr>
             <a:r>
-              <a:rPr/>
-              <a:t>GitHub (public repo): https://github.com/alexgl77/receipt-to-cashback</a:t>
+              <a:rPr sz="1400"/>
+              <a:t>GitHub (public): https://github.com/alexgl77/receipt-to-cashback</a:t>
             </a:r>
             <a:endParaRPr/>
           </a:p>
           <a:p>
             <a:r>
-              <a:rPr/>
+              <a:rPr sz="1400"/>
               <a:t>Live app: https://huggingface.co/spaces/alexgl77/receipt-to-cashback</a:t>
             </a:r>
           </a:p>
           <a:p>
             <a:r>
-              <a:rPr/>
-              <a:t>Demo video (Loom, 2:53): https://www.loom.com/share/b10268c4694f4a8f8cf5e7292aef7a21</a:t>
+              <a:rPr sz="1400"/>
+              <a:t>Loom video (2:53): https://www.loom.com/share/b10268c4694f4a8f8cf5e7292aef7a21</a:t>
             </a:r>
           </a:p>
           <a:p>
             <a:r>
-              <a:rPr/>
-              <a:t>Medium article: not planned</a:t>
+              <a:rPr sz="1400"/>
+              <a:t>Medium: not planned</a:t>
             </a:r>
           </a:p>
         </p:txBody>
@@ -12326,14 +12404,14 @@
               <a:buNone/>
             </a:pPr>
             <a:r>
-              <a:rPr/>
+              <a:rPr sz="1400"/>
               <a:t>CV: [REPLACE WITH YOUR CV URL]</a:t>
             </a:r>
             <a:endParaRPr/>
           </a:p>
           <a:p>
             <a:r>
-              <a:rPr/>
+              <a:rPr sz="1400"/>
               <a:t>LinkedIn: https://www.linkedin.com/in/alex-goldbaum/</a:t>
             </a:r>
           </a:p>
